--- a/mlip_bader/slides/al_effect_bcc_hea.pptx
+++ b/mlip_bader/slides/al_effect_bcc_hea.pptx
@@ -3439,7 +3439,7 @@
                 </a:solidFill>
                 <a:latin typeface="Noto Sans CJK JP"/>
               </a:rPr>
-              <a:t>（σ = 0.54）：分布が広がり、平均は純 Al の −0.33 のみ</a:t>
+              <a:t>（σ = 0.54）：分布が広がり、平均は純 Al の -0.33 のみ</a:t>
             </a:r>
           </a:p>
           <a:p>
@@ -4320,7 +4320,7 @@
                 </a:solidFill>
                 <a:latin typeface="Noto Sans CJK JP"/>
               </a:rPr>
-              <a:t>Al 対は Vegard 収縮側の上位（Ω = -3.3〜-1.6%、Al–V が 15 対中最大）。特に Al–V では Al が −1.92 Å</a:t>
+              <a:t>Al 対は Vegard 収縮側の上位（Ω = -3.3〜-1.6%、Al–V が 15 対中最大）。特に Al–V では Al が -1.92 Å</a:t>
             </a:r>
             <a:r>
               <a:rPr sz="2000" b="0" baseline="30000">
@@ -7691,7 +7691,7 @@
                 </a:solidFill>
                 <a:latin typeface="Noto Sans CJK JP"/>
               </a:rPr>
-              <a:t>非 Al 対の最大収縮は Ta–Zr (-2.2%)、Nb–Zr (-1.7%)；他は |Ω| &lt; 0.6%</a:t>
+              <a:t>非 Al 対の最大収縮は Ta–Zr (-2.2%)、Nb–Zr (-1.7%)；他は |Ω| ≤ 0.6%</a:t>
             </a:r>
           </a:p>
           <a:p>
@@ -8561,7 +8561,7 @@
                 </a:solidFill>
                 <a:latin typeface="Noto Sans CJK JP"/>
               </a:rPr>
-              <a:t>HfNbTaTiZr：5 元素すべて予測と実測が一致（誤差 ≤ 0.3 Å</a:t>
+              <a:t>HfNbTaTiZr：5 元素すべて予測と実測が一致（誤差 ≤ 0.30 Å</a:t>
             </a:r>
             <a:r>
               <a:rPr sz="1600" b="0" baseline="30000">
@@ -8665,7 +8665,7 @@
                 </a:solidFill>
                 <a:latin typeface="Noto Sans CJK JP"/>
               </a:rPr>
-              <a:t>Ti も予測 -0.69 → 実測 -0.31 と半減</a:t>
+              <a:t>Ti も予測 -0.69 → 実測 -0.31（f = 0.45）</a:t>
             </a:r>
           </a:p>
           <a:p>
@@ -8767,7 +8767,7 @@
                 </a:solidFill>
                 <a:latin typeface="Noto Sans CJK JP"/>
               </a:rPr>
-              <a:t>生存率 f：Al だけが f = 0.28（二元系効果の 7 割を喪失）</a:t>
+              <a:t>生存率 f：Al だけが f = 0.28（二元系効果の 72% を喪失）</a:t>
             </a:r>
           </a:p>
         </p:txBody>
@@ -8977,7 +8977,7 @@
                 </a:solidFill>
                 <a:latin typeface="Noto Sans CJK JP"/>
               </a:rPr>
-              <a:t> = −0.45（Vegard より膨張）vs HfNbTaTiZr 1.46</a:t>
+              <a:t> = -0.45（Vegard より膨張）vs HfNbTaTiZr 1.46</a:t>
             </a:r>
           </a:p>
           <a:p>
@@ -9002,7 +9002,7 @@
                 </a:solidFill>
                 <a:latin typeface="Noto Sans CJK JP"/>
               </a:rPr>
-              <a:t>解釈：Al–V の強い収縮（−1.92）は Al–V 対が多数を占める二元系特有で、4 元系では Al 近傍の V 濃度が半分になり Nb/Ti に置き換わるため、Al–V 電荷移動による収縮が非線形に弱まる</a:t>
+              <a:t>解釈：Al–V の強い収縮（-1.92）は Al–V 対が多数を占める二元系特有で、4 元系では Al 近傍の V 濃度が半分になり Nb/Ti に置き換わるため、Al–V 電荷移動による収縮が非線形に弱まる</a:t>
             </a:r>
           </a:p>
         </p:txBody>
